--- a/decks/day1/module-5-agent-stack.pptx
+++ b/decks/day1/module-5-agent-stack.pptx
@@ -881,7 +881,7 @@
               <a:t>• Keep this slide short — attendees already saw model deployments in Module 2
 • Three decisions at this layer:
 •   which model, what capacity, which region
-• Day 5 revisits: model routing (small first, escalate on low confidence)
+• Day 5 revisits managed routing and application-owned escalation as distinct strategies
 • One tip: name deployments by (model, role) not just model</a:t>
             </a:r>
             <a:endParaRPr lang="en-US" dirty="0"/>
@@ -1255,7 +1255,7 @@
 • Emphasize: evaluation is NOT a Day-5 topic
 • Eval appears through the rest of the workshop (Days 2, 3, 4, 5)
 • Day 4 is the eval anchor module
-• Day 5 covers the rest of Ops (identity, tracing, cost, deployment)</a:t>
+• Day 5 covers identity, tracing, cost, and production evaluation; it does not add deployment instruction</a:t>
             </a:r>
             <a:endParaRPr lang="en-US" dirty="0"/>
           </a:p>
@@ -3117,7 +3117,7 @@
                 <a:ea typeface="Calibri" pitchFamily="34" charset="-122"/>
                 <a:cs typeface="Calibri" pitchFamily="34" charset="-120"/>
               </a:rPr>
-              <a:t>Day 5 covers model routing — small model first, escalate on low confidence.</a:t>
+              <a:t>Day 5 distinguishes managed model routing from application-owned, quality-checked escalation.</a:t>
             </a:r>
             <a:endParaRPr lang="en-US" sz="1400" dirty="0"/>
           </a:p>
@@ -4331,7 +4331,7 @@
                 <a:ea typeface="Calibri" pitchFamily="34" charset="-122"/>
                 <a:cs typeface="Calibri" pitchFamily="34" charset="-120"/>
               </a:rPr>
-              <a:t>Day 5 owns most of this — but evaluation is threaded through every day.</a:t>
+              <a:t>Day 5 revisits production-readiness evidence; deployment instruction remains out of scope.</a:t>
             </a:r>
             <a:endParaRPr lang="en-US" sz="1400" dirty="0"/>
           </a:p>
